--- a/outsystems/niveau-3/deel-26/slidedeck.pptx
+++ b/outsystems/niveau-3/deel-26/slidedeck.pptx
@@ -3212,8 +3212,8 @@
         </p:nvSpPr>
         <p:spPr>
           <a:xfrm>
-            <a:off x="640080" y="457200"/>
-            <a:ext cx="10881360" cy="731520"/>
+            <a:off x="640080" y="365760"/>
+            <a:ext cx="10881360" cy="640080"/>
           </a:xfrm>
           <a:prstGeom prst="rect">
             <a:avLst/>
@@ -3228,7 +3228,7 @@
           <a:p>
             <a:pPr algn="l"/>
             <a:r>
-              <a:rPr sz="2600" b="1">
+              <a:rPr sz="2400" b="1">
                 <a:solidFill>
                   <a:srgbClr val="14213D"/>
                 </a:solidFill>
@@ -3248,8 +3248,8 @@
           <p:nvPr/>
         </p:nvGraphicFramePr>
         <p:xfrm>
-          <a:off x="640080" y="1371600"/>
-          <a:ext cx="10881360" cy="1645919"/>
+          <a:off x="640080" y="1097280"/>
+          <a:ext cx="10881360" cy="1371600"/>
         </p:xfrm>
         <a:graphic>
           <a:graphicData uri="http://schemas.openxmlformats.org/drawingml/2006/table">
@@ -3262,7 +3262,7 @@
                 <a:gridCol w="3627120"/>
                 <a:gridCol w="3627120"/>
               </a:tblGrid>
-              <a:tr h="548639">
+              <a:tr h="457200">
                 <a:tc>
                   <a:txBody>
                     <a:bodyPr/>
@@ -3277,7 +3277,7 @@
                     <a:lstStyle/>
                     <a:p>
                       <a:r>
-                        <a:rPr sz="1600" b="1"/>
+                        <a:rPr sz="1400" b="1"/>
                         <a:t>O11</a:t>
                       </a:r>
                     </a:p>
@@ -3290,7 +3290,7 @@
                     <a:lstStyle/>
                     <a:p>
                       <a:r>
-                        <a:rPr sz="1600" b="1"/>
+                        <a:rPr sz="1400" b="1"/>
                         <a:t>ODC</a:t>
                       </a:r>
                     </a:p>
@@ -3298,14 +3298,14 @@
                   <a:tcPr/>
                 </a:tc>
               </a:tr>
-              <a:tr h="548639">
+              <a:tr h="457200">
                 <a:tc>
                   <a:txBody>
                     <a:bodyPr/>
                     <a:lstStyle/>
                     <a:p>
                       <a:r>
-                        <a:rPr sz="1600"/>
+                        <a:rPr sz="1400"/>
                         <a:t>Kern (logica, interface)</a:t>
                       </a:r>
                     </a:p>
@@ -3318,7 +3318,7 @@
                     <a:lstStyle/>
                     <a:p>
                       <a:r>
-                        <a:rPr sz="1600"/>
+                        <a:rPr sz="1400"/>
                         <a:t>Sterk gebonden</a:t>
                       </a:r>
                     </a:p>
@@ -3331,7 +3331,7 @@
                     <a:lstStyle/>
                     <a:p>
                       <a:r>
-                        <a:rPr sz="1600"/>
+                        <a:rPr sz="1400"/>
                         <a:t>Sterk gebonden</a:t>
                       </a:r>
                     </a:p>
@@ -3339,14 +3339,14 @@
                   <a:tcPr/>
                 </a:tc>
               </a:tr>
-              <a:tr h="548641">
+              <a:tr h="457200">
                 <a:tc>
                   <a:txBody>
                     <a:bodyPr/>
                     <a:lstStyle/>
                     <a:p>
                       <a:r>
-                        <a:rPr sz="1600"/>
+                        <a:rPr sz="1400"/>
                         <a:t>Randen (integratie)</a:t>
                       </a:r>
                     </a:p>
@@ -3359,7 +3359,7 @@
                     <a:lstStyle/>
                     <a:p>
                       <a:r>
-                        <a:rPr sz="1600"/>
+                        <a:rPr sz="1400"/>
                         <a:t>Soms diep platform-specifiek</a:t>
                       </a:r>
                     </a:p>
@@ -3372,7 +3372,7 @@
                     <a:lstStyle/>
                     <a:p>
                       <a:r>
-                        <a:rPr sz="1600"/>
+                        <a:rPr sz="1400"/>
                         <a:t>Sterker API-gebaseerd, iets minder gebonden</a:t>
                       </a:r>
                     </a:p>
@@ -3526,8 +3526,8 @@
         </p:nvSpPr>
         <p:spPr>
           <a:xfrm>
-            <a:off x="640080" y="548640"/>
-            <a:ext cx="10881360" cy="914400"/>
+            <a:off x="640080" y="457200"/>
+            <a:ext cx="10881360" cy="822960"/>
           </a:xfrm>
           <a:prstGeom prst="rect">
             <a:avLst/>
@@ -3853,8 +3853,8 @@
         </p:nvSpPr>
         <p:spPr>
           <a:xfrm>
-            <a:off x="640080" y="457200"/>
-            <a:ext cx="10881360" cy="731520"/>
+            <a:off x="640080" y="365760"/>
+            <a:ext cx="10881360" cy="640080"/>
           </a:xfrm>
           <a:prstGeom prst="rect">
             <a:avLst/>
@@ -3869,7 +3869,7 @@
           <a:p>
             <a:pPr algn="l"/>
             <a:r>
-              <a:rPr sz="2600" b="1">
+              <a:rPr sz="2400" b="1">
                 <a:solidFill>
                   <a:srgbClr val="14213D"/>
                 </a:solidFill>
@@ -3889,8 +3889,8 @@
           <p:nvPr/>
         </p:nvGraphicFramePr>
         <p:xfrm>
-          <a:off x="640080" y="1371600"/>
-          <a:ext cx="10881360" cy="2743200"/>
+          <a:off x="640080" y="1097280"/>
+          <a:ext cx="10881360" cy="2286000"/>
         </p:xfrm>
         <a:graphic>
           <a:graphicData uri="http://schemas.openxmlformats.org/drawingml/2006/table">
@@ -3902,14 +3902,14 @@
                 <a:gridCol w="5440680"/>
                 <a:gridCol w="5440680"/>
               </a:tblGrid>
-              <a:tr h="548640">
+              <a:tr h="457200">
                 <a:tc>
                   <a:txBody>
                     <a:bodyPr/>
                     <a:lstStyle/>
                     <a:p>
                       <a:r>
-                        <a:rPr sz="1600" b="1"/>
+                        <a:rPr sz="1400" b="1"/>
                         <a:t>Onderdeel</a:t>
                       </a:r>
                     </a:p>
@@ -3922,7 +3922,7 @@
                     <a:lstStyle/>
                     <a:p>
                       <a:r>
-                        <a:rPr sz="1600" b="1"/>
+                        <a:rPr sz="1400" b="1"/>
                         <a:t>Overdraagbaarheid</a:t>
                       </a:r>
                     </a:p>
@@ -3930,14 +3930,14 @@
                   <a:tcPr/>
                 </a:tc>
               </a:tr>
-              <a:tr h="548640">
+              <a:tr h="457200">
                 <a:tc>
                   <a:txBody>
                     <a:bodyPr/>
                     <a:lstStyle/>
                     <a:p>
                       <a:r>
-                        <a:rPr sz="1600"/>
+                        <a:rPr sz="1400"/>
                         <a:t>Datamodel (entities, relaties)</a:t>
                       </a:r>
                     </a:p>
@@ -3950,7 +3950,7 @@
                     <a:lstStyle/>
                     <a:p>
                       <a:r>
-                        <a:rPr sz="1600"/>
+                        <a:rPr sz="1400"/>
                         <a:t>Relatief goed</a:t>
                       </a:r>
                     </a:p>
@@ -3958,14 +3958,14 @@
                   <a:tcPr/>
                 </a:tc>
               </a:tr>
-              <a:tr h="548640">
+              <a:tr h="457200">
                 <a:tc>
                   <a:txBody>
                     <a:bodyPr/>
                     <a:lstStyle/>
                     <a:p>
                       <a:r>
-                        <a:rPr sz="1600"/>
+                        <a:rPr sz="1400"/>
                         <a:t>REST-koppelvlakken</a:t>
                       </a:r>
                     </a:p>
@@ -3978,7 +3978,7 @@
                     <a:lstStyle/>
                     <a:p>
                       <a:r>
-                        <a:rPr sz="1600"/>
+                        <a:rPr sz="1400"/>
                         <a:t>Relatief goed (protocol is standaard)</a:t>
                       </a:r>
                     </a:p>
@@ -3986,14 +3986,14 @@
                   <a:tcPr/>
                 </a:tc>
               </a:tr>
-              <a:tr h="548640">
+              <a:tr h="457200">
                 <a:tc>
                   <a:txBody>
                     <a:bodyPr/>
                     <a:lstStyle/>
                     <a:p>
                       <a:r>
-                        <a:rPr sz="1600"/>
+                        <a:rPr sz="1400"/>
                         <a:t>Bedrijfslogica, interface</a:t>
                       </a:r>
                     </a:p>
@@ -4006,7 +4006,7 @@
                     <a:lstStyle/>
                     <a:p>
                       <a:r>
-                        <a:rPr sz="1600"/>
+                        <a:rPr sz="1400"/>
                         <a:t>Slecht — platform-specifiek</a:t>
                       </a:r>
                     </a:p>
@@ -4014,14 +4014,14 @@
                   <a:tcPr/>
                 </a:tc>
               </a:tr>
-              <a:tr h="548640">
+              <a:tr h="457200">
                 <a:tc>
                   <a:txBody>
                     <a:bodyPr/>
                     <a:lstStyle/>
                     <a:p>
                       <a:r>
-                        <a:rPr sz="1600"/>
+                        <a:rPr sz="1400"/>
                         <a:t>BPT-processen</a:t>
                       </a:r>
                     </a:p>
@@ -4034,7 +4034,7 @@
                     <a:lstStyle/>
                     <a:p>
                       <a:r>
-                        <a:rPr sz="1600"/>
+                        <a:rPr sz="1400"/>
                         <a:t>Zeer slecht — geen equivalent buiten (en deels binnen) OutSystems</a:t>
                       </a:r>
                     </a:p>
@@ -4322,8 +4322,8 @@
         </p:nvSpPr>
         <p:spPr>
           <a:xfrm>
-            <a:off x="640080" y="548640"/>
-            <a:ext cx="10881360" cy="914400"/>
+            <a:off x="640080" y="457200"/>
+            <a:ext cx="10881360" cy="822960"/>
           </a:xfrm>
           <a:prstGeom prst="rect">
             <a:avLst/>
